--- a/docs/presentaciones/classes/clase-231-capstone-3-vision-por-computadora-con-transfer-learning-presentacion.pptx
+++ b/docs/presentaciones/classes/clase-231-capstone-3-vision-por-computadora-con-transfer-learning-presentacion.pptx
@@ -3272,7 +3272,7 @@
                 </a:solidFill>
                 <a:latin typeface="Segoe UI"/>
               </a:rPr>
-              <a:t>Parte: 8 — Capstones · Fuente: Géron, Hands-On ML 3ª ed. cap. 14-15 + timm + PyTorch Lightning docs.  Duración estimada: 180 min.</a:t>
+              <a:t>Parte: 8 — Capstones · Fuente: Géron, Hands-On ML 3ª ed. cap. 14-15 + timm + PyTorch Lightning docs.  Duración estimada: 180 min. · Nivel: Avanzado</a:t>
             </a:r>
           </a:p>
         </p:txBody>
@@ -3581,7 +3581,7 @@
                 </a:solidFill>
                 <a:latin typeface="Segoe UI"/>
               </a:rPr>
-              <a:t>Parte: 8 — Capstones · Fuente: Géron, Hands-On ML 3ª ed. cap. 14-15 + timm + PyTorch Lightning docs.  Duración estimada: 180 min.</a:t>
+              <a:t>Parte: 8 — Capstones · Fuente: Géron, Hands-On ML 3ª ed. cap. 14-15 + timm + PyTorch Lightning docs.  Duración estimada: 180 min. · Nivel: Avanzado</a:t>
             </a:r>
           </a:p>
         </p:txBody>
